--- a/docs/slides/pptx/M1-understanding.pptx
+++ b/docs/slides/pptx/M1-understanding.pptx
@@ -170,7 +170,7 @@
   <pc:docChgLst>
     <pc:chgData name="J. Tower" userId="9d06de10716639e5" providerId="LiveId" clId="{F8931099-75CA-5660-A155-55881DF68D84}"/>
     <pc:docChg chg="undo redo custSel addSld delSld modSld sldOrd modSection">
-      <pc:chgData name="J. Tower" userId="9d06de10716639e5" providerId="LiveId" clId="{F8931099-75CA-5660-A155-55881DF68D84}" dt="2026-09-03T19:14:50.590" v="1091" actId="20577"/>
+      <pc:chgData name="J. Tower" userId="9d06de10716639e5" providerId="LiveId" clId="{F8931099-75CA-5660-A155-55881DF68D84}" dt="2026-09-17T11:47:03.849" v="1097" actId="20577"/>
       <pc:docMkLst>
         <pc:docMk/>
       </pc:docMkLst>
@@ -232,53 +232,6 @@
             <pc:docMk/>
             <pc:sldMk cId="0" sldId="580"/>
             <ac:spMk id="3" creationId="{00000000-0000-0000-0000-000000000000}"/>
-          </ac:spMkLst>
-        </pc:spChg>
-      </pc:sldChg>
-      <pc:sldChg chg="delSp modSp del mod">
-        <pc:chgData name="J. Tower" userId="9d06de10716639e5" providerId="LiveId" clId="{F8931099-75CA-5660-A155-55881DF68D84}" dt="2026-09-03T19:09:00.344" v="1090" actId="2696"/>
-        <pc:sldMkLst>
-          <pc:docMk/>
-          <pc:sldMk cId="0" sldId="585"/>
-        </pc:sldMkLst>
-        <pc:spChg chg="mod">
-          <ac:chgData name="J. Tower" userId="9d06de10716639e5" providerId="LiveId" clId="{F8931099-75CA-5660-A155-55881DF68D84}" dt="2026-09-03T19:08:49.628" v="1080" actId="21"/>
-          <ac:spMkLst>
-            <pc:docMk/>
-            <pc:sldMk cId="0" sldId="585"/>
-            <ac:spMk id="3" creationId="{00000000-0000-0000-0000-000000000000}"/>
-          </ac:spMkLst>
-        </pc:spChg>
-        <pc:spChg chg="del">
-          <ac:chgData name="J. Tower" userId="9d06de10716639e5" providerId="LiveId" clId="{F8931099-75CA-5660-A155-55881DF68D84}" dt="2026-09-03T19:08:57.937" v="1088" actId="21"/>
-          <ac:spMkLst>
-            <pc:docMk/>
-            <pc:sldMk cId="0" sldId="585"/>
-            <ac:spMk id="4" creationId="{00000000-0000-0000-0000-000000000000}"/>
-          </ac:spMkLst>
-        </pc:spChg>
-        <pc:spChg chg="del">
-          <ac:chgData name="J. Tower" userId="9d06de10716639e5" providerId="LiveId" clId="{F8931099-75CA-5660-A155-55881DF68D84}" dt="2026-09-03T19:08:57.937" v="1088" actId="21"/>
-          <ac:spMkLst>
-            <pc:docMk/>
-            <pc:sldMk cId="0" sldId="585"/>
-            <ac:spMk id="5" creationId="{00000000-0000-0000-0000-000000000000}"/>
-          </ac:spMkLst>
-        </pc:spChg>
-        <pc:spChg chg="del">
-          <ac:chgData name="J. Tower" userId="9d06de10716639e5" providerId="LiveId" clId="{F8931099-75CA-5660-A155-55881DF68D84}" dt="2026-09-03T19:08:57.937" v="1088" actId="21"/>
-          <ac:spMkLst>
-            <pc:docMk/>
-            <pc:sldMk cId="0" sldId="585"/>
-            <ac:spMk id="6" creationId="{00000000-0000-0000-0000-000000000000}"/>
-          </ac:spMkLst>
-        </pc:spChg>
-        <pc:spChg chg="del">
-          <ac:chgData name="J. Tower" userId="9d06de10716639e5" providerId="LiveId" clId="{F8931099-75CA-5660-A155-55881DF68D84}" dt="2026-09-03T19:08:57.937" v="1088" actId="21"/>
-          <ac:spMkLst>
-            <pc:docMk/>
-            <pc:sldMk cId="0" sldId="585"/>
-            <ac:spMk id="7" creationId="{00000000-0000-0000-0000-000000000000}"/>
           </ac:spMkLst>
         </pc:spChg>
       </pc:sldChg>
@@ -412,13 +365,13 @@
         </pc:spChg>
       </pc:sldChg>
       <pc:sldChg chg="modSp mod">
-        <pc:chgData name="J. Tower" userId="9d06de10716639e5" providerId="LiveId" clId="{F8931099-75CA-5660-A155-55881DF68D84}" dt="2026-09-01T19:25:50.109" v="1038" actId="5793"/>
+        <pc:chgData name="J. Tower" userId="9d06de10716639e5" providerId="LiveId" clId="{F8931099-75CA-5660-A155-55881DF68D84}" dt="2026-09-17T11:47:03.849" v="1097" actId="20577"/>
         <pc:sldMkLst>
           <pc:docMk/>
           <pc:sldMk cId="0" sldId="606"/>
         </pc:sldMkLst>
         <pc:spChg chg="mod">
-          <ac:chgData name="J. Tower" userId="9d06de10716639e5" providerId="LiveId" clId="{F8931099-75CA-5660-A155-55881DF68D84}" dt="2026-09-01T19:25:50.109" v="1038" actId="5793"/>
+          <ac:chgData name="J. Tower" userId="9d06de10716639e5" providerId="LiveId" clId="{F8931099-75CA-5660-A155-55881DF68D84}" dt="2026-09-17T11:47:03.849" v="1097" actId="20577"/>
           <ac:spMkLst>
             <pc:docMk/>
             <pc:sldMk cId="0" sldId="606"/>
@@ -619,7 +572,7 @@
           <a:p>
             <a:fld id="{4618B0EE-4D36-4F22-9622-021322CFFE3A}" type="datetimeFigureOut">
               <a:rPr lang="en-US" smtClean="0"/>
-              <a:t>9/3/26</a:t>
+              <a:t>9/17/26</a:t>
             </a:fld>
             <a:endParaRPr lang="en-US"/>
           </a:p>
@@ -1100,12 +1053,12 @@
           <a:lstStyle/>
           <a:p>
             <a:r>
-              <a:t>The user problem, spoken, 60 seconds: Trailhead wants a "trail stats" panel — which trails, when, how far, what wildlife, what condition. All of it exists as prose across the forty reports, and today a human would re-read and re-type it. So the panel doesn't exist.</a:t>
-            </a:r>
-          </a:p>
-          <a:p>
-            <a:r>
-              <a:t>This one gets the module's one concept slide, because the pipeline — and where it lies to you — is the lesson.</a:t>
+              <a:t>The user problem, spoken, 60 seconds: Trailhead wants a "trail stats" panel: which trails, when, how far, what wildlife, what condition. All of it exists as prose across the forty reports, and today a human would re-read and re-type it. So the panel doesn't exist.</a:t>
+            </a:r>
+          </a:p>
+          <a:p>
+            <a:r>
+              <a:t>This one gets the module's one concept slide, because the pipeline, and where it lies to you, is the lesson.</a:t>
             </a:r>
           </a:p>
         </p:txBody>
@@ -2265,12 +2218,12 @@
           <a:lstStyle/>
           <a:p>
             <a:r>
-              <a:t>The user problem, spoken, 60 seconds: the Cascade 65 backpack has 300 reviews. Are people happy, and what are they mad about? Star ratings lie — "4 stars, but the hip belt broke on day two." The user here is the product team, not the hiker; track the signal weekly and a defect surfaces months before returns spike.</a:t>
-            </a:r>
-          </a:p>
-          <a:p>
-            <a:r>
-              <a:t>No concept slide: this is classification, and the demo IS the lesson — the day's model-selection experiment. phi3 free and local vs gpt-4.1 on Azure, same prompt, and you measure instead of assume.</a:t>
+              <a:t>The user problem, spoken, 60 seconds: the Cascade 65 backpack has 300 reviews. Are people happy, and what are they mad about? Star ratings lie: "4 stars, but the hip belt broke on day two." The user here is the product team, not the hiker; track the signal weekly and a defect surfaces months before returns spike.</a:t>
+            </a:r>
+          </a:p>
+          <a:p>
+            <a:r>
+              <a:t>No concept slide: this is classification, and the demo IS the lesson: the day's model-selection experiment. phi3 free and local vs gpt-4.1 on Azure, same prompt, and you measure instead of assume.</a:t>
             </a:r>
           </a:p>
         </p:txBody>
@@ -2921,7 +2874,7 @@
           </a:p>
           <a:p>
             <a:r>
-              <a:t>Pick 03 if your question at work is "which model should we pay for" — its Azure half needs the room key. 02's done-check: the sparse report comes back with nulls and the validator says PASS/REJECT honestly.</a:t>
+              <a:t>Pick 03 if your question at work is "which model should we pay for"; its Azure half needs the room key. 02's done-check: the sparse report comes back with nulls and the validator says PASS/REJECT honestly.</a:t>
             </a:r>
           </a:p>
           <a:p>
@@ -3001,7 +2954,7 @@
           </a:p>
           <a:p>
             <a:r>
-              <a:t>Prompts if quiet: what surfaced the buried bridge, and what invented one? Rows 1–3 of the framework are done. Break, then Module 2.</a:t>
+              <a:t>Prompts if quiet: what surfaced the buried bridge, and what invented one? Rows 1-3 of the framework are done. Break, then Module 2.</a:t>
             </a:r>
           </a:p>
         </p:txBody>
@@ -3769,7 +3722,7 @@
             <a:fld id="{FDB08721-E45B-4A66-93A6-531BE00DB2CF}" type="datetimeFigureOut">
               <a:rPr lang="en-US" smtClean="0"/>
               <a:pPr defTabSz="342900"/>
-              <a:t>9/3/26</a:t>
+              <a:t>9/17/26</a:t>
             </a:fld>
             <a:endParaRPr lang="en-US"/>
           </a:p>
@@ -4111,7 +4064,7 @@
                 </a:solidFill>
               </a:rPr>
               <a:pPr defTabSz="342900"/>
-              <a:t>9/3/26</a:t>
+              <a:t>9/17/26</a:t>
             </a:fld>
             <a:endParaRPr lang="en-US">
               <a:solidFill>
@@ -4324,7 +4277,7 @@
                 </a:solidFill>
               </a:rPr>
               <a:pPr defTabSz="342900"/>
-              <a:t>9/3/26</a:t>
+              <a:t>9/17/26</a:t>
             </a:fld>
             <a:endParaRPr lang="en-US">
               <a:solidFill>
@@ -4527,7 +4480,7 @@
                 </a:solidFill>
               </a:rPr>
               <a:pPr defTabSz="342900"/>
-              <a:t>9/3/26</a:t>
+              <a:t>9/17/26</a:t>
             </a:fld>
             <a:endParaRPr lang="en-US">
               <a:solidFill>
@@ -4817,7 +4770,7 @@
                 </a:solidFill>
               </a:rPr>
               <a:pPr defTabSz="342900"/>
-              <a:t>9/3/26</a:t>
+              <a:t>9/17/26</a:t>
             </a:fld>
             <a:endParaRPr lang="en-US">
               <a:solidFill>
@@ -5137,7 +5090,7 @@
                 </a:solidFill>
               </a:rPr>
               <a:pPr defTabSz="342900"/>
-              <a:t>9/3/26</a:t>
+              <a:t>9/17/26</a:t>
             </a:fld>
             <a:endParaRPr lang="en-US">
               <a:solidFill>
@@ -5607,7 +5560,7 @@
                 </a:solidFill>
               </a:rPr>
               <a:pPr defTabSz="342900"/>
-              <a:t>9/3/26</a:t>
+              <a:t>9/17/26</a:t>
             </a:fld>
             <a:endParaRPr lang="en-US">
               <a:solidFill>
@@ -5759,7 +5712,7 @@
                 </a:solidFill>
               </a:rPr>
               <a:pPr defTabSz="342900"/>
-              <a:t>9/3/26</a:t>
+              <a:t>9/17/26</a:t>
             </a:fld>
             <a:endParaRPr lang="en-US">
               <a:solidFill>
@@ -5889,7 +5842,7 @@
                 </a:solidFill>
               </a:rPr>
               <a:pPr defTabSz="342900"/>
-              <a:t>9/3/26</a:t>
+              <a:t>9/17/26</a:t>
             </a:fld>
             <a:endParaRPr lang="en-US">
               <a:solidFill>
@@ -6278,7 +6231,7 @@
                 </a:solidFill>
               </a:rPr>
               <a:pPr defTabSz="342900"/>
-              <a:t>9/3/26</a:t>
+              <a:t>9/17/26</a:t>
             </a:fld>
             <a:endParaRPr lang="en-US">
               <a:solidFill>
@@ -6609,7 +6562,7 @@
             <a:fld id="{FDB08721-E45B-4A66-93A6-531BE00DB2CF}" type="datetimeFigureOut">
               <a:rPr lang="en-US" smtClean="0"/>
               <a:pPr defTabSz="342900"/>
-              <a:t>9/3/26</a:t>
+              <a:t>9/17/26</a:t>
             </a:fld>
             <a:endParaRPr lang="en-US"/>
           </a:p>
@@ -6853,7 +6806,7 @@
                 </a:solidFill>
               </a:rPr>
               <a:pPr defTabSz="342900"/>
-              <a:t>9/3/26</a:t>
+              <a:t>9/17/26</a:t>
             </a:fld>
             <a:endParaRPr lang="en-US">
               <a:solidFill>
@@ -11601,7 +11554,7 @@
           <a:p>
             <a:r>
               <a:rPr sz="2800" dirty="0"/>
-              <a:t>The last mile is a validator — ordinary code</a:t>
+              <a:t>The last mile is a validator: ordinary code</a:t>
             </a:r>
           </a:p>
         </p:txBody>
@@ -12753,7 +12706,7 @@
           <a:p>
             <a:r>
               <a:rPr sz="2800"/>
-              <a:t>The hard set through both — diff on screen</a:t>
+              <a:t>The hard set through both, diff on screen</a:t>
             </a:r>
           </a:p>
           <a:p>
@@ -12769,7 +12722,7 @@
             </a:r>
             <a:r>
               <a:rPr sz="2800"/>
-              <a:t> 9/10 · 7/10 — </a:t>
+              <a:t> 9/10 · 7/10 vs </a:t>
             </a:r>
             <a:r>
               <a:rPr sz="2800">
@@ -13296,6 +13249,7 @@
           <a:lstStyle/>
           <a:p>
             <a:r>
+              <a:rPr dirty="0"/>
               <a:t>Lab 1: ~60 Minutes</a:t>
             </a:r>
           </a:p>
@@ -13328,123 +13282,50 @@
               <a:rPr sz="3600" dirty="0"/>
               <a:t>⭐ Recommended: </a:t>
             </a:r>
-            <a:r>
-              <a:rPr sz="3600" b="1" dirty="0"/>
-              <a:t>F01 Summarization</a:t>
-            </a:r>
+            <a:endParaRPr lang="en-US" sz="3600" dirty="0"/>
           </a:p>
           <a:p>
             <a:pPr marL="0" indent="0">
               <a:buNone/>
             </a:pPr>
             <a:r>
-              <a:rPr sz="3600" dirty="0"/>
-              <a:t>⛰️ Challenge: </a:t>
-            </a:r>
-            <a:r>
               <a:rPr sz="3600" b="1" dirty="0"/>
-              <a:t>F02 Extraction</a:t>
-            </a:r>
-            <a:r>
-              <a:rPr sz="3600" dirty="0"/>
-              <a:t> · </a:t>
-            </a:r>
-            <a:r>
-              <a:rPr sz="3600" b="1" dirty="0"/>
-              <a:t>F03 Sentiment</a:t>
-            </a:r>
-          </a:p>
-          <a:p>
-            <a:r>
-              <a:rPr sz="2800" dirty="0">
-                <a:latin typeface="Consolas"/>
-              </a:rPr>
-              <a:t>FNN-</a:t>
-            </a:r>
-            <a:r>
-              <a:rPr sz="2800" dirty="0" err="1">
-                <a:latin typeface="Consolas"/>
-              </a:rPr>
-              <a:t>lab.md</a:t>
-            </a:r>
-            <a:r>
-              <a:rPr sz="2800" dirty="0"/>
-              <a:t> · </a:t>
-            </a:r>
-            <a:r>
-              <a:rPr sz="2800" dirty="0">
-                <a:latin typeface="Consolas"/>
-              </a:rPr>
-              <a:t>http/</a:t>
-            </a:r>
-            <a:r>
-              <a:rPr sz="2800" dirty="0" err="1">
-                <a:latin typeface="Consolas"/>
-              </a:rPr>
-              <a:t>ollama.http</a:t>
-            </a:r>
-            <a:r>
-              <a:rPr sz="2800" dirty="0"/>
-              <a:t> · </a:t>
-            </a:r>
-            <a:r>
-              <a:rPr sz="2800" dirty="0">
-                <a:latin typeface="Consolas"/>
-              </a:rPr>
-              <a:t>expected-</a:t>
-            </a:r>
-            <a:r>
-              <a:rPr sz="2800" dirty="0" err="1">
-                <a:latin typeface="Consolas"/>
-              </a:rPr>
-              <a:t>output.md</a:t>
-            </a:r>
-            <a:r>
-              <a:rPr sz="2800" dirty="0"/>
-              <a:t> · </a:t>
-            </a:r>
-            <a:r>
-              <a:rPr sz="2800" dirty="0">
-                <a:latin typeface="Consolas"/>
-              </a:rPr>
-              <a:t>data/</a:t>
-            </a:r>
+              <a:t>F01 Summarization</a:t>
+            </a:r>
+            <a:endParaRPr lang="en-US" sz="3600" b="1" dirty="0"/>
           </a:p>
           <a:p>
             <a:pPr marL="0" indent="0">
               <a:buNone/>
             </a:pPr>
-            <a:endParaRPr lang="en-US" sz="3200" dirty="0"/>
+            <a:endParaRPr sz="3600" b="1" dirty="0"/>
           </a:p>
           <a:p>
             <a:pPr marL="0" indent="0">
               <a:buNone/>
             </a:pPr>
-            <a:endParaRPr lang="en-US" sz="3200" dirty="0"/>
+            <a:r>
+              <a:rPr sz="3600" dirty="0"/>
+              <a:t>⛰️ Challenge: </a:t>
+            </a:r>
+            <a:endParaRPr lang="en-US" sz="3600" dirty="0"/>
           </a:p>
           <a:p>
             <a:pPr marL="0" indent="0">
               <a:buNone/>
             </a:pPr>
             <a:r>
-              <a:rPr sz="3200" dirty="0"/>
-              <a:t>✅ Done = your output similar to </a:t>
-            </a:r>
-            <a:r>
-              <a:rPr sz="3200" dirty="0">
-                <a:latin typeface="Consolas"/>
-              </a:rPr>
-              <a:t>expected-</a:t>
-            </a:r>
-            <a:r>
-              <a:rPr sz="3200" dirty="0" err="1">
-                <a:latin typeface="Consolas"/>
-              </a:rPr>
-              <a:t>output.md</a:t>
-            </a:r>
-            <a:endParaRPr sz="3200" dirty="0">
-              <a:latin typeface="Consolas"/>
-            </a:endParaRPr>
+              <a:rPr sz="3600" b="1" dirty="0"/>
+              <a:t>F02 Extraction</a:t>
+            </a:r>
+            <a:r>
+              <a:rPr sz="3600" dirty="0"/>
+              <a:t> · </a:t>
+            </a:r>
+            <a:r>
+              <a:rPr sz="3600" b="1" dirty="0"/>
+              <a:t>F03 Sentiment</a:t>
+            </a:r>
           </a:p>
         </p:txBody>
       </p:sp>
@@ -14265,7 +14146,7 @@
           <a:p>
             <a:r>
               <a:rPr sz="2800" dirty="0"/>
-              <a:t>Grounding lines — without them, ~half of runs invent a closure</a:t>
+              <a:t>Grounding lines: without them, ~half of runs invent a closure</a:t>
             </a:r>
           </a:p>
           <a:p>
